--- a/track2/session3/MCP_Deck3_Security.pptx
+++ b/track2/session3/MCP_Deck3_Security.pptx
@@ -123,6 +123,11 @@
       </a:defRPr>
     </a:lvl9pPr>
   </p:defaultTextStyle>
+  <p:extLst>
+    <p:ext uri="{EFAFB233-063F-42B5-8137-9DF3F51BA10A}">
+      <p15:sldGuideLst xmlns:p15="http://schemas.microsoft.com/office/powerpoint/2012/main"/>
+    </p:ext>
+  </p:extLst>
 </p:presentation>
 </file>
 
@@ -1358,7 +1363,7 @@
         <p:spPr>
           <a:xfrm>
             <a:off x="685800" y="1143000"/>
-            <a:ext cx="5486040" cy="3085920"/>
+            <a:ext cx="5486400" cy="3086100"/>
           </a:xfrm>
           <a:prstGeom prst="rect">
             <a:avLst/>
@@ -12869,16 +12874,16 @@
               </a:tabLst>
             </a:pPr>
             <a:r>
-              <a:rPr lang="en-US" sz="1200" b="0" strike="noStrike" spc="-1">
+              <a:rPr lang="en-US" sz="1200" b="0" strike="noStrike" spc="-1" dirty="0">
                 <a:solidFill>
                   <a:srgbClr val="3A3536"/>
                 </a:solidFill>
                 <a:latin typeface="Calibri"/>
                 <a:ea typeface="Calibri"/>
               </a:rPr>
-              <a:t>Add cryptographic signatures in the payload, with expiry and replay-protection metadata. Bind requests to time and context (OWASP ASVS V7).</a:t>
+              <a:t>Add cryptographic signatures in the message payload, with expiry and replay-protection metadata. Bind requests to time and context (OWASP ASVS V7).</a:t>
             </a:r>
-            <a:endParaRPr lang="en-US" sz="1200" b="0" strike="noStrike" spc="-1">
+            <a:endParaRPr lang="en-US" sz="1200" b="0" strike="noStrike" spc="-1" dirty="0">
               <a:solidFill>
                 <a:srgbClr val="000000"/>
               </a:solidFill>
@@ -17678,16 +17683,16 @@
               </a:tabLst>
             </a:pPr>
             <a:r>
-              <a:rPr lang="en-US" sz="1200" b="0" strike="noStrike" spc="-1">
+              <a:rPr lang="en-US" sz="1200" b="0" strike="noStrike" spc="-1" dirty="0">
                 <a:solidFill>
                   <a:srgbClr val="E8DFD2"/>
                 </a:solidFill>
                 <a:latin typeface="Calibri"/>
                 <a:ea typeface="Calibri"/>
               </a:rPr>
-              <a:t>Treat MCP like prior plugin and distributed ecosystems — the failure modes rhyme.</a:t>
+              <a:t>Treat MCP like distributed systems — the failure modes are similar.</a:t>
             </a:r>
-            <a:endParaRPr lang="en-US" sz="1200" b="0" strike="noStrike" spc="-1">
+            <a:endParaRPr lang="en-US" sz="1200" b="0" strike="noStrike" spc="-1" dirty="0">
               <a:solidFill>
                 <a:srgbClr val="FFFFFF"/>
               </a:solidFill>
